--- a/report/Prezentaciya_Motion_Playground_Web.pptx
+++ b/report/Prezentaciya_Motion_Playground_Web.pptx
@@ -521,7 +521,7 @@
           <a:lstStyle/>
           <a:p>
             <a:r>
-              <a:t>Программа задумывалась как наглядное пособие: всё, о чём говорится на уроке, можно тут же показать и изменить. Объём — около 16 тысяч строк.</a:t>
+              <a:t>Программа задумывалась как наглядное пособие: всё, о чём говорится на уроке, можно тут же показать и изменить. Объём — около 16 тысяч строк кода.</a:t>
             </a:r>
           </a:p>
         </p:txBody>
@@ -801,7 +801,7 @@
           <a:lstStyle/>
           <a:p>
             <a:r>
-              <a:t>Прямой канал связи разгружает сервер: видео и голос идут между браузерами, а сервер пересылает только короткие служебные сообщения.</a:t>
+              <a:t>Прямой канал разгружает сервер: видео и голос не проходят через него, поэтому даже слабый компьютер выдерживает звонок на класс.</a:t>
             </a:r>
           </a:p>
         </p:txBody>
@@ -871,7 +871,7 @@
           <a:lstStyle/>
           <a:p>
             <a:r>
-              <a:t>Общая сцена нужна, когда преподаватель показывает приём: ученики видят ровно то, что делает учитель, но могут в любой момент вернуться к своей работе.</a:t>
+              <a:t>Общая сцена нужна, когда преподаватель показывает приём, а журнал — когда нужно вспомнить, что именно происходило на уроке.</a:t>
             </a:r>
           </a:p>
         </p:txBody>
@@ -941,7 +941,7 @@
           <a:lstStyle/>
           <a:p>
             <a:r>
-              <a:t>Шахматный движок написан заново: он поддерживает рокировку, взятие на проходе, превращение пешки, шах, мат и пат, и покрыт 34 проверками.</a:t>
+              <a:t>Игры — самый простой способ показать, зачем нужен сервер: правила существуют в одном экземпляре, и оба игрока видят одинаковую доску.</a:t>
             </a:r>
           </a:p>
         </p:txBody>
@@ -1151,7 +1151,7 @@
           <a:lstStyle/>
           <a:p>
             <a:r>
-              <a:t>Собственные реализации появились не случайно: проект должен работать без интернета и без библиотек, поэтому кодировщики написаны с нуля и проверены внешними декодерами.</a:t>
+              <a:t>Кадр считается по системному времени, поэтому скорость анимации не зависит от того, успевает ли браузер обрабатывать все кадры.</a:t>
             </a:r>
           </a:p>
         </p:txBody>
@@ -1221,7 +1221,7 @@
           <a:lstStyle/>
           <a:p>
             <a:r>
-              <a:t>Итог: программа собрана из стандартных браузерных и серверных средств, полностью проверена автоматическими тестами и запускается одним файлом.</a:t>
+              <a:t>Итог: программа собрана из стандартных средств, полностью проверена автоматическими тестами и запускается одним файлом.</a:t>
             </a:r>
           </a:p>
         </p:txBody>
@@ -1291,7 +1291,7 @@
           <a:lstStyle/>
           <a:p>
             <a:r>
-              <a:t>Первый сценарий — объяснение нового материала, второй — практическая работа группы, третий — домашнее задание. Переход между сценариями не требует переустановки или новой сборки.</a:t>
+              <a:t>Первый сценарий — объяснение нового материала, второй — практическая работа группы, третий — домашнее задание. Переход между ними не требует переустановки.</a:t>
             </a:r>
           </a:p>
         </p:txBody>
@@ -1361,7 +1361,7 @@
           <a:lstStyle/>
           <a:p>
             <a:r>
-              <a:t>Окно делится на четыре области. Сцена занимает центр: именно на ней видны объекты, анимации, эффекты и общая доска.</a:t>
+              <a:t>Окно делится на четыре области. Сцена занимает центр: на ней видны объекты, анимации, эффекты и общая доска.</a:t>
             </a:r>
           </a:p>
         </p:txBody>
@@ -1501,7 +1501,7 @@
           <a:lstStyle/>
           <a:p>
             <a:r>
-              <a:t>Анимации работают через Web Animations API с параметром composite add — поэтому пульсация не отменяет вращение. Траектория задаётся формулой или списком точек.</a:t>
+              <a:t>Анимации работают через Web Animations API с параметром composite add, поэтому пульсация не отменяет вращение. Длина пути считается заранее, и объект проходит его равномерно.</a:t>
             </a:r>
           </a:p>
         </p:txBody>
@@ -1571,7 +1571,7 @@
           <a:lstStyle/>
           <a:p>
             <a:r>
-              <a:t>Таймлайн превращает набор настроек в маленький мультфильм: пользователь ставит ключи в начале и в конце, а всё, что между ними, рассчитывается автоматически.</a:t>
+              <a:t>Таймлайн превращает набор настроек в маленький мультфильм: пользователь ставит ключи, а всё, что между ними, рассчитывается автоматически.</a:t>
             </a:r>
           </a:p>
         </p:txBody>
@@ -1641,7 +1641,7 @@
           <a:lstStyle/>
           <a:p>
             <a:r>
-              <a:t>Трёхмерный режим построен на CSS-трансформациях, поэтому он работает даже без WebGL и без сети. WebGL-сцена подключается дополнительно.</a:t>
+              <a:t>Трёхмерный режим построен на CSS-трансформациях, поэтому он работает даже без WebGL и без сети. Сцена WebGL подключается дополнительно.</a:t>
             </a:r>
           </a:p>
         </p:txBody>
@@ -1711,7 +1711,7 @@
           <a:lstStyle/>
           <a:p>
             <a:r>
-              <a:t>Звук не хранится в файлах, а вычисляется в браузере, поэтому в проекте нет ни одной звуковой дорожки и программа остаётся полностью автономной.</a:t>
+              <a:t>Звук не хранится в файлах, а вычисляется в браузере, поэтому в проекте нет ни одной звуковой дорожки, и программа остаётся полностью автономной.</a:t>
             </a:r>
           </a:p>
         </p:txBody>
@@ -6139,6 +6139,25 @@
               <a:t>• При обрыве связи — переподключение с задержкой до 15 секунд, без перезагрузки</a:t>
             </a:r>
           </a:p>
+          <a:p>
+            <a:pPr algn="l">
+              <a:lnSpc>
+                <a:spcPct val="105000"/>
+              </a:lnSpc>
+              <a:spcAft>
+                <a:spcPts val="1000"/>
+              </a:spcAft>
+            </a:pPr>
+            <a:r>
+              <a:rPr sz="1700" b="0">
+                <a:solidFill>
+                  <a:srgbClr val="1F2937"/>
+                </a:solidFill>
+                <a:latin typeface="Times New Roman"/>
+              </a:rPr>
+              <a:t>• Ping каждые 25 секунд; участник без сообщений 90 секунд удаляется из комнаты</a:t>
+            </a:r>
+          </a:p>
         </p:txBody>
       </p:sp>
       <p:pic>
@@ -6809,7 +6828,7 @@
                 </a:solidFill>
                 <a:latin typeface="Times New Roman"/>
               </a:rPr>
-              <a:t>Звонок, экран, панель ведущего</a:t>
+              <a:t>Звонок и демонстрация экрана</a:t>
             </a:r>
           </a:p>
         </p:txBody>
@@ -6895,7 +6914,7 @@
                 </a:solidFill>
                 <a:latin typeface="Times New Roman"/>
               </a:rPr>
-              <a:t>• Видеозвонок и демонстрация экрана по WebRTC, напрямую между браузерами</a:t>
+              <a:t>• Видео, голос и экран — по WebRTC, напрямую между браузерами</a:t>
             </a:r>
           </a:p>
           <a:p>
@@ -6914,7 +6933,7 @@
                 </a:solidFill>
                 <a:latin typeface="Times New Roman"/>
               </a:rPr>
-              <a:t>• Сервер участвует только в установлении соединения и пересылает сигналы</a:t>
+              <a:t>• Сервер пересылает только offer, answer и ICE-кандидаты</a:t>
             </a:r>
           </a:p>
           <a:p>
@@ -6975,7 +6994,7 @@
                 </a:solidFill>
                 <a:latin typeface="Times New Roman"/>
               </a:rPr>
-              <a:t>• Панель ведущего: заморозить комнату, исключить участника, дать объявление</a:t>
+              <a:t>• Без прямого соединения звонок ждёт, а чат и сцена продолжают работать</a:t>
             </a:r>
           </a:p>
           <a:p>
@@ -6994,7 +7013,7 @@
                 </a:solidFill>
                 <a:latin typeface="Times New Roman"/>
               </a:rPr>
-              <a:t>• Живые курсоры: видно, кто и где работает на сцене</a:t>
+              <a:t>• Камера и экран доступны по HTTPS или на localhost — требование браузеров</a:t>
             </a:r>
           </a:p>
         </p:txBody>
@@ -7226,7 +7245,7 @@
                 </a:solidFill>
                 <a:latin typeface="Times New Roman"/>
               </a:rPr>
-              <a:t>Общая сцена, журнал, плагины</a:t>
+              <a:t>Общая сцена и журнал занятия</a:t>
             </a:r>
           </a:p>
         </p:txBody>
@@ -7350,7 +7369,7 @@
                 </a:solidFill>
                 <a:latin typeface="Times New Roman"/>
               </a:rPr>
-              <a:t>• Журнал занятия: до 800 событий, выгрузка в Markdown</a:t>
+              <a:t>• Журнал занятия: до 800 событий — входы, действия, игры, объявления</a:t>
             </a:r>
           </a:p>
         </p:txBody>
@@ -7392,7 +7411,7 @@
                 </a:solidFill>
                 <a:latin typeface="Times New Roman"/>
               </a:rPr>
-              <a:t>• Плагины: открытое API window.__motion и песочница без доступа к document</a:t>
+              <a:t>• Журнал можно просмотреть, скопировать и выгрузить в Markdown</a:t>
             </a:r>
           </a:p>
           <a:p>
@@ -7411,7 +7430,7 @@
                 </a:solidFill>
                 <a:latin typeface="Times New Roman"/>
               </a:rPr>
-              <a:t>• Три готовых примера плагина находятся во вкладке «Справка»</a:t>
+              <a:t>• История пишется в data/rooms.json и переживает перезапуск сервера</a:t>
             </a:r>
           </a:p>
         </p:txBody>
@@ -8897,7 +8916,7 @@
                 </a:solidFill>
                 <a:latin typeface="Times New Roman"/>
               </a:rPr>
-              <a:t>Путь одного кадра и свои алгоритмы</a:t>
+              <a:t>Путь одного кадра</a:t>
             </a:r>
           </a:p>
         </p:txBody>
@@ -8983,7 +9002,7 @@
                 </a:solidFill>
                 <a:latin typeface="Times New Roman"/>
               </a:rPr>
-              <a:t>• Кадр: ввод → состояние → расчёт → отрисовка → обмен, 60 раз в секунду</a:t>
+              <a:t>• Ввод: мышь, панели, таймлайн, голос, сообщения из комнаты</a:t>
             </a:r>
           </a:p>
           <a:p>
@@ -9002,7 +9021,7 @@
                 </a:solidFill>
                 <a:latin typeface="Times New Roman"/>
               </a:rPr>
-              <a:t>• Свой генератор QR-кодов: стандарт ISO/IEC 18004, версии 1–10, уровень M</a:t>
+              <a:t>• Состояние: единый объект и история для отмены действий</a:t>
             </a:r>
           </a:p>
           <a:p>
@@ -9021,7 +9040,7 @@
                 </a:solidFill>
                 <a:latin typeface="Times New Roman"/>
               </a:rPr>
-              <a:t>• Свой кодировщик GIF89a: палитра 256 цветов и сжатие LZW</a:t>
+              <a:t>• Расчёт: шаг времени, траектория, физика, значения между ключами</a:t>
             </a:r>
           </a:p>
           <a:p>
@@ -9040,7 +9059,7 @@
                 </a:solidFill>
                 <a:latin typeface="Times New Roman"/>
               </a:rPr>
-              <a:t>• Свой шахматный движок: рокировка, взятие на проходе, мат и пат</a:t>
+              <a:t>• Отрисовка: transform и стили объектов, слои canvas для фона и эффектов</a:t>
             </a:r>
           </a:p>
           <a:p>
@@ -9059,7 +9078,7 @@
                 </a:solidFill>
                 <a:latin typeface="Times New Roman"/>
               </a:rPr>
-              <a:t>• QR и GIF проверяются независимыми декодерами — чужими программами</a:t>
+              <a:t>• Обмен: снимок сцены участникам, запись видео и GIF, экспорт CSS/HTML</a:t>
             </a:r>
           </a:p>
         </p:txBody>
@@ -9401,7 +9420,7 @@
                 </a:solidFill>
                 <a:latin typeface="Times New Roman"/>
               </a:rPr>
-              <a:t>• Редактор анимаций в браузере: объекты, анимации, траектории, физика</a:t>
+              <a:t>• Редактор анимаций: объекты, анимации, траектории, физика</a:t>
             </a:r>
           </a:p>
           <a:p>
@@ -11360,7 +11379,7 @@
                 </a:solidFill>
                 <a:latin typeface="Times New Roman"/>
               </a:rPr>
-              <a:t>Анимации, траектории, физика</a:t>
+              <a:t>Анимации и траектории</a:t>
             </a:r>
           </a:p>
         </p:txBody>
@@ -11545,7 +11564,7 @@
                 </a:solidFill>
                 <a:latin typeface="Times New Roman"/>
               </a:rPr>
-              <a:t>• Физика: гравитация, отскок с коэффициентом 0,78, столкновения объектов</a:t>
+              <a:t>• Движение по нарисованному пути идёт с постоянной скоростью</a:t>
             </a:r>
           </a:p>
         </p:txBody>
